--- a/slides/Lecture_Partial_Observability.pptx
+++ b/slides/Lecture_Partial_Observability.pptx
@@ -264,7 +264,7 @@
           <a:p>
             <a:fld id="{0E2397CE-1729-4F80-8FF6-27D57F1BB015}" type="datetimeFigureOut">
               <a:rPr lang="en-US" smtClean="0"/>
-              <a:t>6/13/2026</a:t>
+              <a:t>7/6/2026</a:t>
             </a:fld>
             <a:endParaRPr lang="en-US"/>
           </a:p>
@@ -922,7 +922,7 @@
           <a:p>
             <a:fld id="{3E22BF2E-04DA-469E-97C5-BB68A0368813}" type="datetimeFigureOut">
               <a:rPr lang="en-US" smtClean="0"/>
-              <a:t>6/13/2026</a:t>
+              <a:t>7/6/2026</a:t>
             </a:fld>
             <a:endParaRPr lang="en-US"/>
           </a:p>
@@ -1120,7 +1120,7 @@
           <a:p>
             <a:fld id="{3E22BF2E-04DA-469E-97C5-BB68A0368813}" type="datetimeFigureOut">
               <a:rPr lang="en-US" smtClean="0"/>
-              <a:t>6/13/2026</a:t>
+              <a:t>7/6/2026</a:t>
             </a:fld>
             <a:endParaRPr lang="en-US"/>
           </a:p>
@@ -1328,7 +1328,7 @@
           <a:p>
             <a:fld id="{3E22BF2E-04DA-469E-97C5-BB68A0368813}" type="datetimeFigureOut">
               <a:rPr lang="en-US" smtClean="0"/>
-              <a:t>6/13/2026</a:t>
+              <a:t>7/6/2026</a:t>
             </a:fld>
             <a:endParaRPr lang="en-US"/>
           </a:p>
@@ -1536,7 +1536,7 @@
           <a:p>
             <a:fld id="{3E22BF2E-04DA-469E-97C5-BB68A0368813}" type="datetimeFigureOut">
               <a:rPr lang="en-US" smtClean="0"/>
-              <a:t>6/13/2026</a:t>
+              <a:t>7/6/2026</a:t>
             </a:fld>
             <a:endParaRPr lang="en-US"/>
           </a:p>
@@ -1811,7 +1811,7 @@
           <a:p>
             <a:fld id="{3E22BF2E-04DA-469E-97C5-BB68A0368813}" type="datetimeFigureOut">
               <a:rPr lang="en-US" smtClean="0"/>
-              <a:t>6/13/2026</a:t>
+              <a:t>7/6/2026</a:t>
             </a:fld>
             <a:endParaRPr lang="en-US"/>
           </a:p>
@@ -2076,7 +2076,7 @@
           <a:p>
             <a:fld id="{3E22BF2E-04DA-469E-97C5-BB68A0368813}" type="datetimeFigureOut">
               <a:rPr lang="en-US" smtClean="0"/>
-              <a:t>6/13/2026</a:t>
+              <a:t>7/6/2026</a:t>
             </a:fld>
             <a:endParaRPr lang="en-US"/>
           </a:p>
@@ -2488,7 +2488,7 @@
           <a:p>
             <a:fld id="{3E22BF2E-04DA-469E-97C5-BB68A0368813}" type="datetimeFigureOut">
               <a:rPr lang="en-US" smtClean="0"/>
-              <a:t>6/13/2026</a:t>
+              <a:t>7/6/2026</a:t>
             </a:fld>
             <a:endParaRPr lang="en-US"/>
           </a:p>
@@ -2629,7 +2629,7 @@
           <a:p>
             <a:fld id="{3E22BF2E-04DA-469E-97C5-BB68A0368813}" type="datetimeFigureOut">
               <a:rPr lang="en-US" smtClean="0"/>
-              <a:t>6/13/2026</a:t>
+              <a:t>7/6/2026</a:t>
             </a:fld>
             <a:endParaRPr lang="en-US"/>
           </a:p>
@@ -2742,7 +2742,7 @@
           <a:p>
             <a:fld id="{3E22BF2E-04DA-469E-97C5-BB68A0368813}" type="datetimeFigureOut">
               <a:rPr lang="en-US" smtClean="0"/>
-              <a:t>6/13/2026</a:t>
+              <a:t>7/6/2026</a:t>
             </a:fld>
             <a:endParaRPr lang="en-US"/>
           </a:p>
@@ -3053,7 +3053,7 @@
           <a:p>
             <a:fld id="{3E22BF2E-04DA-469E-97C5-BB68A0368813}" type="datetimeFigureOut">
               <a:rPr lang="en-US" smtClean="0"/>
-              <a:t>6/13/2026</a:t>
+              <a:t>7/6/2026</a:t>
             </a:fld>
             <a:endParaRPr lang="en-US"/>
           </a:p>
@@ -3341,7 +3341,7 @@
           <a:p>
             <a:fld id="{3E22BF2E-04DA-469E-97C5-BB68A0368813}" type="datetimeFigureOut">
               <a:rPr lang="en-US" smtClean="0"/>
-              <a:t>6/13/2026</a:t>
+              <a:t>7/6/2026</a:t>
             </a:fld>
             <a:endParaRPr lang="en-US"/>
           </a:p>
@@ -3582,7 +3582,7 @@
           <a:p>
             <a:fld id="{3E22BF2E-04DA-469E-97C5-BB68A0368813}" type="datetimeFigureOut">
               <a:rPr lang="en-US" smtClean="0"/>
-              <a:t>6/13/2026</a:t>
+              <a:t>7/6/2026</a:t>
             </a:fld>
             <a:endParaRPr lang="en-US"/>
           </a:p>
@@ -6722,8 +6722,8 @@
           </a:p>
         </p:txBody>
       </p:sp>
-      <mc:AlternateContent xmlns:mc="http://schemas.openxmlformats.org/markup-compatibility/2006">
-        <mc:Choice xmlns:a14="http://schemas.microsoft.com/office/drawing/2010/main" Requires="a14">
+      <mc:AlternateContent xmlns:mc="http://schemas.openxmlformats.org/markup-compatibility/2006" xmlns:a14="http://schemas.microsoft.com/office/drawing/2010/main">
+        <mc:Choice Requires="a14">
           <p:sp>
             <p:nvSpPr>
               <p:cNvPr id="3" name="Content Placeholder 2">
@@ -7124,7 +7124,7 @@
             </p:txBody>
           </p:sp>
         </mc:Choice>
-        <mc:Fallback>
+        <mc:Fallback xmlns="">
           <p:sp>
             <p:nvSpPr>
               <p:cNvPr id="3" name="Content Placeholder 2">
@@ -8224,8 +8224,8 @@
           </a:p>
         </p:txBody>
       </p:sp>
-      <mc:AlternateContent xmlns:mc="http://schemas.openxmlformats.org/markup-compatibility/2006">
-        <mc:Choice xmlns:a14="http://schemas.microsoft.com/office/drawing/2010/main" Requires="a14">
+      <mc:AlternateContent xmlns:mc="http://schemas.openxmlformats.org/markup-compatibility/2006" xmlns:a14="http://schemas.microsoft.com/office/drawing/2010/main">
+        <mc:Choice Requires="a14">
           <p:sp>
             <p:nvSpPr>
               <p:cNvPr id="4" name="Content Placeholder 3">
@@ -8793,7 +8793,7 @@
             </p:txBody>
           </p:sp>
         </mc:Choice>
-        <mc:Fallback>
+        <mc:Fallback xmlns="">
           <p:sp>
             <p:nvSpPr>
               <p:cNvPr id="4" name="Content Placeholder 3">
@@ -15057,8 +15057,8 @@
             <a:chExt cx="381000" cy="1828488"/>
           </a:xfrm>
         </p:grpSpPr>
-        <mc:AlternateContent xmlns:mc="http://schemas.openxmlformats.org/markup-compatibility/2006">
-          <mc:Choice xmlns:a14="http://schemas.microsoft.com/office/drawing/2010/main" Requires="a14">
+        <mc:AlternateContent xmlns:mc="http://schemas.openxmlformats.org/markup-compatibility/2006" xmlns:a14="http://schemas.microsoft.com/office/drawing/2010/main">
+          <mc:Choice Requires="a14">
             <p:sp>
               <p:nvSpPr>
                 <p:cNvPr id="51" name="Oval 50">
@@ -15144,7 +15144,7 @@
               </p:txBody>
             </p:sp>
           </mc:Choice>
-          <mc:Fallback>
+          <mc:Fallback xmlns="">
             <p:sp>
               <p:nvSpPr>
                 <p:cNvPr id="51" name="Oval 50">
@@ -15189,8 +15189,8 @@
             </p:sp>
           </mc:Fallback>
         </mc:AlternateContent>
-        <mc:AlternateContent xmlns:mc="http://schemas.openxmlformats.org/markup-compatibility/2006">
-          <mc:Choice xmlns:a14="http://schemas.microsoft.com/office/drawing/2010/main" Requires="a14">
+        <mc:AlternateContent xmlns:mc="http://schemas.openxmlformats.org/markup-compatibility/2006" xmlns:a14="http://schemas.microsoft.com/office/drawing/2010/main">
+          <mc:Choice Requires="a14">
             <p:sp>
               <p:nvSpPr>
                 <p:cNvPr id="52" name="Oval 51">
@@ -15276,7 +15276,7 @@
               </p:txBody>
             </p:sp>
           </mc:Choice>
-          <mc:Fallback>
+          <mc:Fallback xmlns="">
             <p:sp>
               <p:nvSpPr>
                 <p:cNvPr id="52" name="Oval 51">
@@ -15363,8 +15363,8 @@
             </a:fontRef>
           </p:style>
         </p:cxnSp>
-        <mc:AlternateContent xmlns:mc="http://schemas.openxmlformats.org/markup-compatibility/2006">
-          <mc:Choice xmlns:a14="http://schemas.microsoft.com/office/drawing/2010/main" Requires="a14">
+        <mc:AlternateContent xmlns:mc="http://schemas.openxmlformats.org/markup-compatibility/2006" xmlns:a14="http://schemas.microsoft.com/office/drawing/2010/main">
+          <mc:Choice Requires="a14">
             <p:sp>
               <p:nvSpPr>
                 <p:cNvPr id="54" name="Oval 53">
@@ -15450,7 +15450,7 @@
               </p:txBody>
             </p:sp>
           </mc:Choice>
-          <mc:Fallback>
+          <mc:Fallback xmlns="">
             <p:sp>
               <p:nvSpPr>
                 <p:cNvPr id="54" name="Oval 53">
@@ -15635,8 +15635,8 @@
           </a:p>
         </p:txBody>
       </p:sp>
-      <mc:AlternateContent xmlns:mc="http://schemas.openxmlformats.org/markup-compatibility/2006">
-        <mc:Choice xmlns:a14="http://schemas.microsoft.com/office/drawing/2010/main" Requires="a14">
+      <mc:AlternateContent xmlns:mc="http://schemas.openxmlformats.org/markup-compatibility/2006" xmlns:a14="http://schemas.microsoft.com/office/drawing/2010/main">
+        <mc:Choice Requires="a14">
           <p:sp>
             <p:nvSpPr>
               <p:cNvPr id="63" name="TextBox 62">
@@ -15665,6 +15665,7 @@
               </a:bodyPr>
               <a:lstStyle/>
               <a:p>
+                <a:pPr/>
                 <a14:m>
                   <m:oMathPara xmlns:m="http://schemas.openxmlformats.org/officeDocument/2006/math">
                     <m:oMathParaPr>
@@ -15813,7 +15814,7 @@
             </p:txBody>
           </p:sp>
         </mc:Choice>
-        <mc:Fallback>
+        <mc:Fallback xmlns="">
           <p:sp>
             <p:nvSpPr>
               <p:cNvPr id="63" name="TextBox 62">
@@ -15890,8 +15891,8 @@
           </a:p>
         </p:txBody>
       </p:sp>
-      <mc:AlternateContent xmlns:mc="http://schemas.openxmlformats.org/markup-compatibility/2006">
-        <mc:Choice xmlns:a14="http://schemas.microsoft.com/office/drawing/2010/main" Requires="a14">
+      <mc:AlternateContent xmlns:mc="http://schemas.openxmlformats.org/markup-compatibility/2006" xmlns:a14="http://schemas.microsoft.com/office/drawing/2010/main">
+        <mc:Choice Requires="a14">
           <p:sp>
             <p:nvSpPr>
               <p:cNvPr id="66" name="TextBox 65">
@@ -16035,7 +16036,7 @@
             </p:txBody>
           </p:sp>
         </mc:Choice>
-        <mc:Fallback>
+        <mc:Fallback xmlns="">
           <p:sp>
             <p:nvSpPr>
               <p:cNvPr id="66" name="TextBox 65">
@@ -16155,8 +16156,8 @@
               </a:p>
             </p:txBody>
           </p:sp>
-          <mc:AlternateContent xmlns:mc="http://schemas.openxmlformats.org/markup-compatibility/2006">
-            <mc:Choice xmlns:a14="http://schemas.microsoft.com/office/drawing/2010/main" Requires="a14">
+          <mc:AlternateContent xmlns:mc="http://schemas.openxmlformats.org/markup-compatibility/2006" xmlns:a14="http://schemas.microsoft.com/office/drawing/2010/main">
+            <mc:Choice Requires="a14">
               <p:sp>
                 <p:nvSpPr>
                   <p:cNvPr id="14" name="Oval 13">
@@ -16242,7 +16243,7 @@
                 </p:txBody>
               </p:sp>
             </mc:Choice>
-            <mc:Fallback>
+            <mc:Fallback xmlns="">
               <p:sp>
                 <p:nvSpPr>
                   <p:cNvPr id="14" name="Oval 13">
@@ -16287,8 +16288,8 @@
               </p:sp>
             </mc:Fallback>
           </mc:AlternateContent>
-          <mc:AlternateContent xmlns:mc="http://schemas.openxmlformats.org/markup-compatibility/2006">
-            <mc:Choice xmlns:a14="http://schemas.microsoft.com/office/drawing/2010/main" Requires="a14">
+          <mc:AlternateContent xmlns:mc="http://schemas.openxmlformats.org/markup-compatibility/2006" xmlns:a14="http://schemas.microsoft.com/office/drawing/2010/main">
+            <mc:Choice Requires="a14">
               <p:sp>
                 <p:nvSpPr>
                   <p:cNvPr id="16" name="Oval 15">
@@ -16374,7 +16375,7 @@
                 </p:txBody>
               </p:sp>
             </mc:Choice>
-            <mc:Fallback>
+            <mc:Fallback xmlns="">
               <p:sp>
                 <p:nvSpPr>
                   <p:cNvPr id="16" name="Oval 15">
@@ -16419,8 +16420,8 @@
               </p:sp>
             </mc:Fallback>
           </mc:AlternateContent>
-          <mc:AlternateContent xmlns:mc="http://schemas.openxmlformats.org/markup-compatibility/2006">
-            <mc:Choice xmlns:a14="http://schemas.microsoft.com/office/drawing/2010/main" Requires="a14">
+          <mc:AlternateContent xmlns:mc="http://schemas.openxmlformats.org/markup-compatibility/2006" xmlns:a14="http://schemas.microsoft.com/office/drawing/2010/main">
+            <mc:Choice Requires="a14">
               <p:sp>
                 <p:nvSpPr>
                   <p:cNvPr id="17" name="Oval 16">
@@ -16506,7 +16507,7 @@
                 </p:txBody>
               </p:sp>
             </mc:Choice>
-            <mc:Fallback>
+            <mc:Fallback xmlns="">
               <p:sp>
                 <p:nvSpPr>
                   <p:cNvPr id="17" name="Oval 16">
@@ -16551,8 +16552,8 @@
               </p:sp>
             </mc:Fallback>
           </mc:AlternateContent>
-          <mc:AlternateContent xmlns:mc="http://schemas.openxmlformats.org/markup-compatibility/2006">
-            <mc:Choice xmlns:a14="http://schemas.microsoft.com/office/drawing/2010/main" Requires="a14">
+          <mc:AlternateContent xmlns:mc="http://schemas.openxmlformats.org/markup-compatibility/2006" xmlns:a14="http://schemas.microsoft.com/office/drawing/2010/main">
+            <mc:Choice Requires="a14">
               <p:sp>
                 <p:nvSpPr>
                   <p:cNvPr id="22" name="Oval 21">
@@ -16638,7 +16639,7 @@
                 </p:txBody>
               </p:sp>
             </mc:Choice>
-            <mc:Fallback>
+            <mc:Fallback xmlns="">
               <p:sp>
                 <p:nvSpPr>
                   <p:cNvPr id="22" name="Oval 21">
@@ -16683,8 +16684,8 @@
               </p:sp>
             </mc:Fallback>
           </mc:AlternateContent>
-          <mc:AlternateContent xmlns:mc="http://schemas.openxmlformats.org/markup-compatibility/2006">
-            <mc:Choice xmlns:a14="http://schemas.microsoft.com/office/drawing/2010/main" Requires="a14">
+          <mc:AlternateContent xmlns:mc="http://schemas.openxmlformats.org/markup-compatibility/2006" xmlns:a14="http://schemas.microsoft.com/office/drawing/2010/main">
+            <mc:Choice Requires="a14">
               <p:sp>
                 <p:nvSpPr>
                   <p:cNvPr id="23" name="Oval 22">
@@ -16770,7 +16771,7 @@
                 </p:txBody>
               </p:sp>
             </mc:Choice>
-            <mc:Fallback>
+            <mc:Fallback xmlns="">
               <p:sp>
                 <p:nvSpPr>
                   <p:cNvPr id="23" name="Oval 22">
@@ -16815,8 +16816,8 @@
               </p:sp>
             </mc:Fallback>
           </mc:AlternateContent>
-          <mc:AlternateContent xmlns:mc="http://schemas.openxmlformats.org/markup-compatibility/2006">
-            <mc:Choice xmlns:a14="http://schemas.microsoft.com/office/drawing/2010/main" Requires="a14">
+          <mc:AlternateContent xmlns:mc="http://schemas.openxmlformats.org/markup-compatibility/2006" xmlns:a14="http://schemas.microsoft.com/office/drawing/2010/main">
+            <mc:Choice Requires="a14">
               <p:sp>
                 <p:nvSpPr>
                   <p:cNvPr id="24" name="Oval 23">
@@ -16902,7 +16903,7 @@
                 </p:txBody>
               </p:sp>
             </mc:Choice>
-            <mc:Fallback>
+            <mc:Fallback xmlns="">
               <p:sp>
                 <p:nvSpPr>
                   <p:cNvPr id="24" name="Oval 23">
@@ -16947,8 +16948,8 @@
               </p:sp>
             </mc:Fallback>
           </mc:AlternateContent>
-          <mc:AlternateContent xmlns:mc="http://schemas.openxmlformats.org/markup-compatibility/2006">
-            <mc:Choice xmlns:a14="http://schemas.microsoft.com/office/drawing/2010/main" Requires="a14">
+          <mc:AlternateContent xmlns:mc="http://schemas.openxmlformats.org/markup-compatibility/2006" xmlns:a14="http://schemas.microsoft.com/office/drawing/2010/main">
+            <mc:Choice Requires="a14">
               <p:sp>
                 <p:nvSpPr>
                   <p:cNvPr id="25" name="Oval 24">
@@ -17034,7 +17035,7 @@
                 </p:txBody>
               </p:sp>
             </mc:Choice>
-            <mc:Fallback>
+            <mc:Fallback xmlns="">
               <p:sp>
                 <p:nvSpPr>
                   <p:cNvPr id="25" name="Oval 24">
@@ -17378,8 +17379,8 @@
               </a:fontRef>
             </p:style>
           </p:cxnSp>
-          <mc:AlternateContent xmlns:mc="http://schemas.openxmlformats.org/markup-compatibility/2006">
-            <mc:Choice xmlns:a14="http://schemas.microsoft.com/office/drawing/2010/main" Requires="a14">
+          <mc:AlternateContent xmlns:mc="http://schemas.openxmlformats.org/markup-compatibility/2006" xmlns:a14="http://schemas.microsoft.com/office/drawing/2010/main">
+            <mc:Choice Requires="a14">
               <p:sp>
                 <p:nvSpPr>
                   <p:cNvPr id="33" name="Oval 32">
@@ -17465,7 +17466,7 @@
                 </p:txBody>
               </p:sp>
             </mc:Choice>
-            <mc:Fallback>
+            <mc:Fallback xmlns="">
               <p:sp>
                 <p:nvSpPr>
                   <p:cNvPr id="33" name="Oval 32">
@@ -17553,8 +17554,8 @@
               </a:fontRef>
             </p:style>
           </p:cxnSp>
-          <mc:AlternateContent xmlns:mc="http://schemas.openxmlformats.org/markup-compatibility/2006">
-            <mc:Choice xmlns:a14="http://schemas.microsoft.com/office/drawing/2010/main" Requires="a14">
+          <mc:AlternateContent xmlns:mc="http://schemas.openxmlformats.org/markup-compatibility/2006" xmlns:a14="http://schemas.microsoft.com/office/drawing/2010/main">
+            <mc:Choice Requires="a14">
               <p:sp>
                 <p:nvSpPr>
                   <p:cNvPr id="40" name="Oval 39">
@@ -17640,7 +17641,7 @@
                 </p:txBody>
               </p:sp>
             </mc:Choice>
-            <mc:Fallback>
+            <mc:Fallback xmlns="">
               <p:sp>
                 <p:nvSpPr>
                   <p:cNvPr id="40" name="Oval 39">
@@ -17728,8 +17729,8 @@
               </a:fontRef>
             </p:style>
           </p:cxnSp>
-          <mc:AlternateContent xmlns:mc="http://schemas.openxmlformats.org/markup-compatibility/2006">
-            <mc:Choice xmlns:a14="http://schemas.microsoft.com/office/drawing/2010/main" Requires="a14">
+          <mc:AlternateContent xmlns:mc="http://schemas.openxmlformats.org/markup-compatibility/2006" xmlns:a14="http://schemas.microsoft.com/office/drawing/2010/main">
+            <mc:Choice Requires="a14">
               <p:sp>
                 <p:nvSpPr>
                   <p:cNvPr id="43" name="Oval 42">
@@ -17815,7 +17816,7 @@
                 </p:txBody>
               </p:sp>
             </mc:Choice>
-            <mc:Fallback>
+            <mc:Fallback xmlns="">
               <p:sp>
                 <p:nvSpPr>
                   <p:cNvPr id="43" name="Oval 42">
@@ -18015,8 +18016,8 @@
           </p:sp>
         </p:grpSp>
       </p:grpSp>
-      <mc:AlternateContent xmlns:mc="http://schemas.openxmlformats.org/markup-compatibility/2006">
-        <mc:Choice xmlns:a14="http://schemas.microsoft.com/office/drawing/2010/main" Requires="a14">
+      <mc:AlternateContent xmlns:mc="http://schemas.openxmlformats.org/markup-compatibility/2006" xmlns:a14="http://schemas.microsoft.com/office/drawing/2010/main">
+        <mc:Choice Requires="a14">
           <p:sp>
             <p:nvSpPr>
               <p:cNvPr id="71" name="TextBox 70">
@@ -18140,7 +18141,7 @@
             </p:txBody>
           </p:sp>
         </mc:Choice>
-        <mc:Fallback>
+        <mc:Fallback xmlns="">
           <p:sp>
             <p:nvSpPr>
               <p:cNvPr id="71" name="TextBox 70">
@@ -18278,8 +18279,8 @@
           </a:p>
         </p:txBody>
       </p:sp>
-      <mc:AlternateContent xmlns:mc="http://schemas.openxmlformats.org/markup-compatibility/2006">
-        <mc:Choice xmlns:a14="http://schemas.microsoft.com/office/drawing/2010/main" Requires="a14">
+      <mc:AlternateContent xmlns:mc="http://schemas.openxmlformats.org/markup-compatibility/2006" xmlns:a14="http://schemas.microsoft.com/office/drawing/2010/main">
+        <mc:Choice Requires="a14">
           <p:sp>
             <p:nvSpPr>
               <p:cNvPr id="3" name="Content Placeholder 2">
@@ -18676,13 +18677,7 @@
                       <a:rPr lang="en-US" i="1">
                         <a:latin typeface="Cambria Math" panose="02040503050406030204" pitchFamily="18" charset="0"/>
                       </a:rPr>
-                      <m:t>)</m:t>
-                    </m:r>
-                    <m:r>
-                      <a:rPr lang="en-US" i="1">
-                        <a:latin typeface="Cambria Math" panose="02040503050406030204" pitchFamily="18" charset="0"/>
-                      </a:rPr>
-                      <m:t>,</m:t>
+                      <m:t>),</m:t>
                     </m:r>
                     <m:r>
                       <a:rPr lang="en-US" i="1">
@@ -18758,7 +18753,7 @@
             </p:txBody>
           </p:sp>
         </mc:Choice>
-        <mc:Fallback>
+        <mc:Fallback xmlns="">
           <p:sp>
             <p:nvSpPr>
               <p:cNvPr id="3" name="Content Placeholder 2">
@@ -19005,8 +19000,8 @@
               </a:p>
             </p:txBody>
           </p:sp>
-          <mc:AlternateContent xmlns:mc="http://schemas.openxmlformats.org/markup-compatibility/2006">
-            <mc:Choice xmlns:a14="http://schemas.microsoft.com/office/drawing/2010/main" Requires="a14">
+          <mc:AlternateContent xmlns:mc="http://schemas.openxmlformats.org/markup-compatibility/2006" xmlns:a14="http://schemas.microsoft.com/office/drawing/2010/main">
+            <mc:Choice Requires="a14">
               <p:sp>
                 <p:nvSpPr>
                   <p:cNvPr id="6" name="Rectangle 5">
@@ -19068,7 +19063,7 @@
                 </p:txBody>
               </p:sp>
             </mc:Choice>
-            <mc:Fallback>
+            <mc:Fallback xmlns="">
               <p:sp>
                 <p:nvSpPr>
                   <p:cNvPr id="6" name="Rectangle 5">
@@ -21056,8 +21051,8 @@
           </a:p>
         </p:txBody>
       </p:sp>
-      <mc:AlternateContent xmlns:mc="http://schemas.openxmlformats.org/markup-compatibility/2006">
-        <mc:Choice xmlns:a14="http://schemas.microsoft.com/office/drawing/2010/main" Requires="a14">
+      <mc:AlternateContent xmlns:mc="http://schemas.openxmlformats.org/markup-compatibility/2006" xmlns:a14="http://schemas.microsoft.com/office/drawing/2010/main">
+        <mc:Choice Requires="a14">
           <p:sp>
             <p:nvSpPr>
               <p:cNvPr id="3" name="Content Placeholder 2">
@@ -21185,7 +21180,7 @@
             </p:txBody>
           </p:sp>
         </mc:Choice>
-        <mc:Fallback>
+        <mc:Fallback xmlns="">
           <p:sp>
             <p:nvSpPr>
               <p:cNvPr id="3" name="Content Placeholder 2">
@@ -21385,7 +21380,7 @@
         <p:spPr/>
         <p:txBody>
           <a:bodyPr>
-            <a:normAutofit fontScale="85000" lnSpcReduction="20000"/>
+            <a:normAutofit fontScale="70000" lnSpcReduction="20000"/>
           </a:bodyPr>
           <a:lstStyle/>
           <a:p>
@@ -21396,7 +21391,7 @@
           </a:p>
           <a:p>
             <a:r>
-              <a:rPr lang="en-US" b="1" dirty="0"/>
+              <a:rPr lang="en-US" dirty="0"/>
               <a:t>Markov decision processes</a:t>
             </a:r>
           </a:p>
@@ -21471,7 +21466,7 @@
           <a:p>
             <a:r>
               <a:rPr lang="en-US" dirty="0"/>
-              <a:t>Part III: Modern RL Methods</a:t>
+              <a:t>Part III: Looking Deeper</a:t>
             </a:r>
           </a:p>
           <a:p>
@@ -21484,61 +21479,22 @@
           <a:p>
             <a:pPr lvl="1"/>
             <a:r>
+              <a:rPr lang="en-US" b="1" dirty="0"/>
+              <a:t>Partial Observability</a:t>
+            </a:r>
+          </a:p>
+          <a:p>
+            <a:pPr lvl="1"/>
+            <a:r>
+              <a:rPr lang="en-US" dirty="0"/>
+              <a:t>Reward Engineering</a:t>
+            </a:r>
+          </a:p>
+          <a:p>
+            <a:pPr lvl="1"/>
+            <a:r>
               <a:rPr lang="en-US" dirty="0"/>
               <a:t>Current Applications</a:t>
-            </a:r>
-          </a:p>
-        </p:txBody>
-      </p:sp>
-      <p:sp>
-        <p:nvSpPr>
-          <p:cNvPr id="4" name="TextBox 3">
-            <a:extLst>
-              <a:ext uri="{FF2B5EF4-FFF2-40B4-BE49-F238E27FC236}">
-                <a16:creationId xmlns:a16="http://schemas.microsoft.com/office/drawing/2014/main" id="{4E460A34-76F3-7E37-7B5E-949E4722A147}"/>
-              </a:ext>
-            </a:extLst>
-          </p:cNvPr>
-          <p:cNvSpPr txBox="1"/>
-          <p:nvPr/>
-        </p:nvSpPr>
-        <p:spPr>
-          <a:xfrm rot="2438598">
-            <a:off x="214349" y="3278585"/>
-            <a:ext cx="6258468" cy="830997"/>
-          </a:xfrm>
-          <a:prstGeom prst="rect">
-            <a:avLst/>
-          </a:prstGeom>
-        </p:spPr>
-        <p:style>
-          <a:lnRef idx="2">
-            <a:schemeClr val="dk1"/>
-          </a:lnRef>
-          <a:fillRef idx="1">
-            <a:schemeClr val="lt1"/>
-          </a:fillRef>
-          <a:effectRef idx="0">
-            <a:schemeClr val="dk1"/>
-          </a:effectRef>
-          <a:fontRef idx="minor">
-            <a:schemeClr val="dk1"/>
-          </a:fontRef>
-        </p:style>
-        <p:txBody>
-          <a:bodyPr wrap="square" rtlCol="0">
-            <a:spAutoFit/>
-          </a:bodyPr>
-          <a:lstStyle/>
-          <a:p>
-            <a:pPr algn="ctr"/>
-            <a:r>
-              <a:rPr lang="en-US" sz="4800" b="1" dirty="0">
-                <a:solidFill>
-                  <a:srgbClr val="FF0000"/>
-                </a:solidFill>
-              </a:rPr>
-              <a:t>Partial Observability</a:t>
             </a:r>
           </a:p>
         </p:txBody>
@@ -21609,8 +21565,8 @@
           </a:p>
         </p:txBody>
       </p:sp>
-      <mc:AlternateContent xmlns:mc="http://schemas.openxmlformats.org/markup-compatibility/2006">
-        <mc:Choice xmlns:a14="http://schemas.microsoft.com/office/drawing/2010/main" Requires="a14">
+      <mc:AlternateContent xmlns:mc="http://schemas.openxmlformats.org/markup-compatibility/2006" xmlns:a14="http://schemas.microsoft.com/office/drawing/2010/main">
+        <mc:Choice Requires="a14">
           <p:sp>
             <p:nvSpPr>
               <p:cNvPr id="3" name="Content Placeholder 2">
@@ -22006,7 +21962,7 @@
             </p:txBody>
           </p:sp>
         </mc:Choice>
-        <mc:Fallback>
+        <mc:Fallback xmlns="">
           <p:sp>
             <p:nvSpPr>
               <p:cNvPr id="3" name="Content Placeholder 2">
@@ -22327,8 +22283,8 @@
           </a:p>
         </p:txBody>
       </p:sp>
-      <mc:AlternateContent xmlns:mc="http://schemas.openxmlformats.org/markup-compatibility/2006">
-        <mc:Choice xmlns:a14="http://schemas.microsoft.com/office/drawing/2010/main" Requires="a14">
+      <mc:AlternateContent xmlns:mc="http://schemas.openxmlformats.org/markup-compatibility/2006" xmlns:a14="http://schemas.microsoft.com/office/drawing/2010/main">
+        <mc:Choice Requires="a14">
           <p:sp>
             <p:nvSpPr>
               <p:cNvPr id="13" name="TextBox 12">
@@ -22514,7 +22470,7 @@
                         <m:rPr>
                           <m:nor/>
                         </m:rPr>
-                        <a:rPr lang="en-US" dirty="0"/>
+                        <a:rPr lang="en-US" i="0" dirty="0"/>
                         <m:t> </m:t>
                       </m:r>
                       <m:sSub>
@@ -22565,7 +22521,7 @@
             </p:txBody>
           </p:sp>
         </mc:Choice>
-        <mc:Fallback>
+        <mc:Fallback xmlns="">
           <p:sp>
             <p:nvSpPr>
               <p:cNvPr id="13" name="TextBox 12">
@@ -22778,8 +22734,8 @@
             </a:fontRef>
           </p:style>
         </p:pic>
-        <mc:AlternateContent xmlns:mc="http://schemas.openxmlformats.org/markup-compatibility/2006">
-          <mc:Choice xmlns:a14="http://schemas.microsoft.com/office/drawing/2010/main" Requires="a14">
+        <mc:AlternateContent xmlns:mc="http://schemas.openxmlformats.org/markup-compatibility/2006" xmlns:a14="http://schemas.microsoft.com/office/drawing/2010/main">
+          <mc:Choice Requires="a14">
             <p:sp>
               <p:nvSpPr>
                 <p:cNvPr id="24" name="TextBox 23">
@@ -22808,6 +22764,7 @@
                 </a:bodyPr>
                 <a:lstStyle/>
                 <a:p>
+                  <a:pPr/>
                   <a14:m>
                     <m:oMathPara xmlns:m="http://schemas.openxmlformats.org/officeDocument/2006/math">
                       <m:oMathParaPr>
@@ -22853,7 +22810,7 @@
               </p:txBody>
             </p:sp>
           </mc:Choice>
-          <mc:Fallback>
+          <mc:Fallback xmlns="">
             <p:sp>
               <p:nvSpPr>
                 <p:cNvPr id="24" name="TextBox 23">
@@ -22898,8 +22855,8 @@
             </p:sp>
           </mc:Fallback>
         </mc:AlternateContent>
-        <mc:AlternateContent xmlns:mc="http://schemas.openxmlformats.org/markup-compatibility/2006">
-          <mc:Choice xmlns:a14="http://schemas.microsoft.com/office/drawing/2010/main" Requires="a14">
+        <mc:AlternateContent xmlns:mc="http://schemas.openxmlformats.org/markup-compatibility/2006" xmlns:a14="http://schemas.microsoft.com/office/drawing/2010/main">
+          <mc:Choice Requires="a14">
             <p:sp>
               <p:nvSpPr>
                 <p:cNvPr id="25" name="TextBox 24">
@@ -22928,6 +22885,7 @@
                 </a:bodyPr>
                 <a:lstStyle/>
                 <a:p>
+                  <a:pPr/>
                   <a14:m>
                     <m:oMathPara xmlns:m="http://schemas.openxmlformats.org/officeDocument/2006/math">
                       <m:oMathParaPr>
@@ -22967,7 +22925,7 @@
               </p:txBody>
             </p:sp>
           </mc:Choice>
-          <mc:Fallback>
+          <mc:Fallback xmlns="">
             <p:sp>
               <p:nvSpPr>
                 <p:cNvPr id="25" name="TextBox 24">
@@ -23047,8 +23005,8 @@
             </a:p>
           </p:txBody>
         </p:sp>
-        <mc:AlternateContent xmlns:mc="http://schemas.openxmlformats.org/markup-compatibility/2006">
-          <mc:Choice xmlns:a14="http://schemas.microsoft.com/office/drawing/2010/main" Requires="a14">
+        <mc:AlternateContent xmlns:mc="http://schemas.openxmlformats.org/markup-compatibility/2006" xmlns:a14="http://schemas.microsoft.com/office/drawing/2010/main">
+          <mc:Choice Requires="a14">
             <p:sp>
               <p:nvSpPr>
                 <p:cNvPr id="27" name="TextBox 26">
@@ -23077,6 +23035,7 @@
                 </a:bodyPr>
                 <a:lstStyle/>
                 <a:p>
+                  <a:pPr/>
                   <a14:m>
                     <m:oMathPara xmlns:m="http://schemas.openxmlformats.org/officeDocument/2006/math">
                       <m:oMathParaPr>
@@ -23116,7 +23075,7 @@
               </p:txBody>
             </p:sp>
           </mc:Choice>
-          <mc:Fallback>
+          <mc:Fallback xmlns="">
             <p:sp>
               <p:nvSpPr>
                 <p:cNvPr id="27" name="TextBox 26">
@@ -23161,8 +23120,8 @@
             </p:sp>
           </mc:Fallback>
         </mc:AlternateContent>
-        <mc:AlternateContent xmlns:mc="http://schemas.openxmlformats.org/markup-compatibility/2006">
-          <mc:Choice xmlns:a14="http://schemas.microsoft.com/office/drawing/2010/main" Requires="a14">
+        <mc:AlternateContent xmlns:mc="http://schemas.openxmlformats.org/markup-compatibility/2006" xmlns:a14="http://schemas.microsoft.com/office/drawing/2010/main">
+          <mc:Choice Requires="a14">
             <p:sp>
               <p:nvSpPr>
                 <p:cNvPr id="28" name="TextBox 27">
@@ -23191,6 +23150,7 @@
                 </a:bodyPr>
                 <a:lstStyle/>
                 <a:p>
+                  <a:pPr/>
                   <a14:m>
                     <m:oMathPara xmlns:m="http://schemas.openxmlformats.org/officeDocument/2006/math">
                       <m:oMathParaPr>
@@ -23236,7 +23196,7 @@
               </p:txBody>
             </p:sp>
           </mc:Choice>
-          <mc:Fallback>
+          <mc:Fallback xmlns="">
             <p:sp>
               <p:nvSpPr>
                 <p:cNvPr id="28" name="TextBox 27">
@@ -31340,8 +31300,8 @@
             </p:txBody>
           </p:sp>
         </p:grpSp>
-        <mc:AlternateContent xmlns:mc="http://schemas.openxmlformats.org/markup-compatibility/2006">
-          <mc:Choice xmlns:a14="http://schemas.microsoft.com/office/drawing/2010/main" Requires="a14">
+        <mc:AlternateContent xmlns:mc="http://schemas.openxmlformats.org/markup-compatibility/2006" xmlns:a14="http://schemas.microsoft.com/office/drawing/2010/main">
+          <mc:Choice Requires="a14">
             <p:sp>
               <p:nvSpPr>
                 <p:cNvPr id="123" name="Speech Bubble: Rectangle with Corners Rounded 122">
@@ -31407,7 +31367,7 @@
               </p:txBody>
             </p:sp>
           </mc:Choice>
-          <mc:Fallback>
+          <mc:Fallback xmlns="">
             <p:sp>
               <p:nvSpPr>
                 <p:cNvPr id="123" name="Speech Bubble: Rectangle with Corners Rounded 122">
@@ -35989,8 +35949,8 @@
             </a:p>
           </p:txBody>
         </p:sp>
-        <mc:AlternateContent xmlns:mc="http://schemas.openxmlformats.org/markup-compatibility/2006">
-          <mc:Choice xmlns:a14="http://schemas.microsoft.com/office/drawing/2010/main" Requires="a14">
+        <mc:AlternateContent xmlns:mc="http://schemas.openxmlformats.org/markup-compatibility/2006" xmlns:a14="http://schemas.microsoft.com/office/drawing/2010/main">
+          <mc:Choice Requires="a14">
             <p:sp>
               <p:nvSpPr>
                 <p:cNvPr id="48" name="TextBox 47">
@@ -36205,7 +36165,7 @@
               </p:txBody>
             </p:sp>
           </mc:Choice>
-          <mc:Fallback>
+          <mc:Fallback xmlns="">
             <p:sp>
               <p:nvSpPr>
                 <p:cNvPr id="48" name="TextBox 47">
